--- a/Planning docs/Slides/lesson-4-4-teacher-slides.pptx
+++ b/Planning docs/Slides/lesson-4-4-teacher-slides.pptx
@@ -3191,24 +3191,7 @@
                 <a:ea typeface="Calibri" pitchFamily="34" charset="-122"/>
                 <a:cs typeface="Calibri" pitchFamily="34" charset="-120"/>
               </a:rPr>
-              <a:t>•  Flat Stanley is fiction, but it touches on real topics like mailing packages, visiting museums, and being different. What is one thing you learned from an extension text that made you understand Stanley's story better?</a:t>
-            </a:r>
-            <a:endParaRPr lang="en-US" sz="1500" dirty="0"/>
-          </a:p>
-          <a:p>
-            <a:pPr indent="0" marL="0">
-              <a:buNone/>
-            </a:pPr>
-            <a:r>
-              <a:rPr lang="en-US" sz="1500" dirty="0">
-                <a:solidFill>
-                  <a:srgbClr val="1E293B"/>
-                </a:solidFill>
-                <a:latin typeface="Calibri" pitchFamily="34" charset="0"/>
-                <a:ea typeface="Calibri" pitchFamily="34" charset="-122"/>
-                <a:cs typeface="Calibri" pitchFamily="34" charset="-120"/>
-              </a:rPr>
-              <a:t>•  Mrs. Lambchop says it’s wrong to dislike people for how they look. How does Stanley’s experience connect to this message?</a:t>
+              <a:t>•  Stop after the article defines informational text — headings, facts and details. Name one thing you learned only from the story, and one thing you learned only from the articles this week.</a:t>
             </a:r>
             <a:endParaRPr lang="en-US" sz="1500" dirty="0"/>
           </a:p>
